--- a/在耶穌的腳前(崇拜版).pptx
+++ b/在耶穌的腳前(崇拜版).pptx
@@ -154,7 +154,7 @@
           <a:lstStyle/>
           <a:p>
             <a:r>
-              <a:rPr lang="en-US" altLang="zh-TW" smtClean="0"/>
+              <a:rPr lang="en-US" altLang="zh-TW"/>
               <a:t>Click to edit Master title style</a:t>
             </a:r>
             <a:endParaRPr lang="zh-TW" altLang="en-US"/>
@@ -273,7 +273,7 @@
           </a:lstStyle>
           <a:p>
             <a:r>
-              <a:rPr lang="en-US" altLang="zh-TW" smtClean="0"/>
+              <a:rPr lang="en-US" altLang="zh-TW"/>
               <a:t>Click to edit Master subtitle style</a:t>
             </a:r>
             <a:endParaRPr lang="zh-TW" altLang="en-US"/>
@@ -297,7 +297,7 @@
           <a:p>
             <a:fld id="{F1F17F5A-78C3-4C81-9BEA-AC4AB491BAD8}" type="datetimeFigureOut">
               <a:rPr lang="vi-VN" smtClean="0"/>
-              <a:t>30/01/2021</a:t>
+              <a:t>01/06/2024</a:t>
             </a:fld>
             <a:endParaRPr lang="vi-VN"/>
           </a:p>
@@ -391,7 +391,7 @@
           <a:lstStyle/>
           <a:p>
             <a:r>
-              <a:rPr lang="en-US" altLang="zh-TW" smtClean="0"/>
+              <a:rPr lang="en-US" altLang="zh-TW"/>
               <a:t>Click to edit Master title style</a:t>
             </a:r>
             <a:endParaRPr lang="zh-TW" altLang="en-US"/>
@@ -415,35 +415,35 @@
           <a:p>
             <a:pPr lvl="0"/>
             <a:r>
-              <a:rPr lang="en-US" altLang="zh-TW" smtClean="0"/>
+              <a:rPr lang="en-US" altLang="zh-TW"/>
               <a:t>Edit Master text styles</a:t>
             </a:r>
           </a:p>
           <a:p>
             <a:pPr lvl="1"/>
             <a:r>
-              <a:rPr lang="en-US" altLang="zh-TW" smtClean="0"/>
+              <a:rPr lang="en-US" altLang="zh-TW"/>
               <a:t>Second level</a:t>
             </a:r>
           </a:p>
           <a:p>
             <a:pPr lvl="2"/>
             <a:r>
-              <a:rPr lang="en-US" altLang="zh-TW" smtClean="0"/>
+              <a:rPr lang="en-US" altLang="zh-TW"/>
               <a:t>Third level</a:t>
             </a:r>
           </a:p>
           <a:p>
             <a:pPr lvl="3"/>
             <a:r>
-              <a:rPr lang="en-US" altLang="zh-TW" smtClean="0"/>
+              <a:rPr lang="en-US" altLang="zh-TW"/>
               <a:t>Fourth level</a:t>
             </a:r>
           </a:p>
           <a:p>
             <a:pPr lvl="4"/>
             <a:r>
-              <a:rPr lang="en-US" altLang="zh-TW" smtClean="0"/>
+              <a:rPr lang="en-US" altLang="zh-TW"/>
               <a:t>Fifth level</a:t>
             </a:r>
             <a:endParaRPr lang="zh-TW" altLang="en-US"/>
@@ -467,7 +467,7 @@
           <a:p>
             <a:fld id="{F1F17F5A-78C3-4C81-9BEA-AC4AB491BAD8}" type="datetimeFigureOut">
               <a:rPr lang="vi-VN" smtClean="0"/>
-              <a:t>30/01/2021</a:t>
+              <a:t>01/06/2024</a:t>
             </a:fld>
             <a:endParaRPr lang="vi-VN"/>
           </a:p>
@@ -566,7 +566,7 @@
           <a:lstStyle/>
           <a:p>
             <a:r>
-              <a:rPr lang="en-US" altLang="zh-TW" smtClean="0"/>
+              <a:rPr lang="en-US" altLang="zh-TW"/>
               <a:t>Click to edit Master title style</a:t>
             </a:r>
             <a:endParaRPr lang="zh-TW" altLang="en-US"/>
@@ -595,35 +595,35 @@
           <a:p>
             <a:pPr lvl="0"/>
             <a:r>
-              <a:rPr lang="en-US" altLang="zh-TW" smtClean="0"/>
+              <a:rPr lang="en-US" altLang="zh-TW"/>
               <a:t>Edit Master text styles</a:t>
             </a:r>
           </a:p>
           <a:p>
             <a:pPr lvl="1"/>
             <a:r>
-              <a:rPr lang="en-US" altLang="zh-TW" smtClean="0"/>
+              <a:rPr lang="en-US" altLang="zh-TW"/>
               <a:t>Second level</a:t>
             </a:r>
           </a:p>
           <a:p>
             <a:pPr lvl="2"/>
             <a:r>
-              <a:rPr lang="en-US" altLang="zh-TW" smtClean="0"/>
+              <a:rPr lang="en-US" altLang="zh-TW"/>
               <a:t>Third level</a:t>
             </a:r>
           </a:p>
           <a:p>
             <a:pPr lvl="3"/>
             <a:r>
-              <a:rPr lang="en-US" altLang="zh-TW" smtClean="0"/>
+              <a:rPr lang="en-US" altLang="zh-TW"/>
               <a:t>Fourth level</a:t>
             </a:r>
           </a:p>
           <a:p>
             <a:pPr lvl="4"/>
             <a:r>
-              <a:rPr lang="en-US" altLang="zh-TW" smtClean="0"/>
+              <a:rPr lang="en-US" altLang="zh-TW"/>
               <a:t>Fifth level</a:t>
             </a:r>
             <a:endParaRPr lang="zh-TW" altLang="en-US"/>
@@ -647,7 +647,7 @@
           <a:p>
             <a:fld id="{F1F17F5A-78C3-4C81-9BEA-AC4AB491BAD8}" type="datetimeFigureOut">
               <a:rPr lang="vi-VN" smtClean="0"/>
-              <a:t>30/01/2021</a:t>
+              <a:t>01/06/2024</a:t>
             </a:fld>
             <a:endParaRPr lang="vi-VN"/>
           </a:p>
@@ -741,7 +741,7 @@
           <a:lstStyle/>
           <a:p>
             <a:r>
-              <a:rPr lang="en-US" altLang="zh-TW" smtClean="0"/>
+              <a:rPr lang="en-US" altLang="zh-TW"/>
               <a:t>Click to edit Master title style</a:t>
             </a:r>
             <a:endParaRPr lang="zh-TW" altLang="en-US"/>
@@ -765,35 +765,35 @@
           <a:p>
             <a:pPr lvl="0"/>
             <a:r>
-              <a:rPr lang="en-US" altLang="zh-TW" smtClean="0"/>
+              <a:rPr lang="en-US" altLang="zh-TW"/>
               <a:t>Edit Master text styles</a:t>
             </a:r>
           </a:p>
           <a:p>
             <a:pPr lvl="1"/>
             <a:r>
-              <a:rPr lang="en-US" altLang="zh-TW" smtClean="0"/>
+              <a:rPr lang="en-US" altLang="zh-TW"/>
               <a:t>Second level</a:t>
             </a:r>
           </a:p>
           <a:p>
             <a:pPr lvl="2"/>
             <a:r>
-              <a:rPr lang="en-US" altLang="zh-TW" smtClean="0"/>
+              <a:rPr lang="en-US" altLang="zh-TW"/>
               <a:t>Third level</a:t>
             </a:r>
           </a:p>
           <a:p>
             <a:pPr lvl="3"/>
             <a:r>
-              <a:rPr lang="en-US" altLang="zh-TW" smtClean="0"/>
+              <a:rPr lang="en-US" altLang="zh-TW"/>
               <a:t>Fourth level</a:t>
             </a:r>
           </a:p>
           <a:p>
             <a:pPr lvl="4"/>
             <a:r>
-              <a:rPr lang="en-US" altLang="zh-TW" smtClean="0"/>
+              <a:rPr lang="en-US" altLang="zh-TW"/>
               <a:t>Fifth level</a:t>
             </a:r>
             <a:endParaRPr lang="zh-TW" altLang="en-US"/>
@@ -817,7 +817,7 @@
           <a:p>
             <a:fld id="{F1F17F5A-78C3-4C81-9BEA-AC4AB491BAD8}" type="datetimeFigureOut">
               <a:rPr lang="vi-VN" smtClean="0"/>
-              <a:t>30/01/2021</a:t>
+              <a:t>01/06/2024</a:t>
             </a:fld>
             <a:endParaRPr lang="vi-VN"/>
           </a:p>
@@ -920,7 +920,7 @@
           </a:lstStyle>
           <a:p>
             <a:r>
-              <a:rPr lang="en-US" altLang="zh-TW" smtClean="0"/>
+              <a:rPr lang="en-US" altLang="zh-TW"/>
               <a:t>Click to edit Master title style</a:t>
             </a:r>
             <a:endParaRPr lang="zh-TW" altLang="en-US"/>
@@ -1040,7 +1040,7 @@
           <a:p>
             <a:pPr lvl="0"/>
             <a:r>
-              <a:rPr lang="en-US" altLang="zh-TW" smtClean="0"/>
+              <a:rPr lang="en-US" altLang="zh-TW"/>
               <a:t>Edit Master text styles</a:t>
             </a:r>
           </a:p>
@@ -1063,7 +1063,7 @@
           <a:p>
             <a:fld id="{F1F17F5A-78C3-4C81-9BEA-AC4AB491BAD8}" type="datetimeFigureOut">
               <a:rPr lang="vi-VN" smtClean="0"/>
-              <a:t>30/01/2021</a:t>
+              <a:t>01/06/2024</a:t>
             </a:fld>
             <a:endParaRPr lang="vi-VN"/>
           </a:p>
@@ -1157,7 +1157,7 @@
           <a:lstStyle/>
           <a:p>
             <a:r>
-              <a:rPr lang="en-US" altLang="zh-TW" smtClean="0"/>
+              <a:rPr lang="en-US" altLang="zh-TW"/>
               <a:t>Click to edit Master title style</a:t>
             </a:r>
             <a:endParaRPr lang="zh-TW" altLang="en-US"/>
@@ -1214,35 +1214,35 @@
           <a:p>
             <a:pPr lvl="0"/>
             <a:r>
-              <a:rPr lang="en-US" altLang="zh-TW" smtClean="0"/>
+              <a:rPr lang="en-US" altLang="zh-TW"/>
               <a:t>Edit Master text styles</a:t>
             </a:r>
           </a:p>
           <a:p>
             <a:pPr lvl="1"/>
             <a:r>
-              <a:rPr lang="en-US" altLang="zh-TW" smtClean="0"/>
+              <a:rPr lang="en-US" altLang="zh-TW"/>
               <a:t>Second level</a:t>
             </a:r>
           </a:p>
           <a:p>
             <a:pPr lvl="2"/>
             <a:r>
-              <a:rPr lang="en-US" altLang="zh-TW" smtClean="0"/>
+              <a:rPr lang="en-US" altLang="zh-TW"/>
               <a:t>Third level</a:t>
             </a:r>
           </a:p>
           <a:p>
             <a:pPr lvl="3"/>
             <a:r>
-              <a:rPr lang="en-US" altLang="zh-TW" smtClean="0"/>
+              <a:rPr lang="en-US" altLang="zh-TW"/>
               <a:t>Fourth level</a:t>
             </a:r>
           </a:p>
           <a:p>
             <a:pPr lvl="4"/>
             <a:r>
-              <a:rPr lang="en-US" altLang="zh-TW" smtClean="0"/>
+              <a:rPr lang="en-US" altLang="zh-TW"/>
               <a:t>Fifth level</a:t>
             </a:r>
             <a:endParaRPr lang="zh-TW" altLang="en-US"/>
@@ -1299,35 +1299,35 @@
           <a:p>
             <a:pPr lvl="0"/>
             <a:r>
-              <a:rPr lang="en-US" altLang="zh-TW" smtClean="0"/>
+              <a:rPr lang="en-US" altLang="zh-TW"/>
               <a:t>Edit Master text styles</a:t>
             </a:r>
           </a:p>
           <a:p>
             <a:pPr lvl="1"/>
             <a:r>
-              <a:rPr lang="en-US" altLang="zh-TW" smtClean="0"/>
+              <a:rPr lang="en-US" altLang="zh-TW"/>
               <a:t>Second level</a:t>
             </a:r>
           </a:p>
           <a:p>
             <a:pPr lvl="2"/>
             <a:r>
-              <a:rPr lang="en-US" altLang="zh-TW" smtClean="0"/>
+              <a:rPr lang="en-US" altLang="zh-TW"/>
               <a:t>Third level</a:t>
             </a:r>
           </a:p>
           <a:p>
             <a:pPr lvl="3"/>
             <a:r>
-              <a:rPr lang="en-US" altLang="zh-TW" smtClean="0"/>
+              <a:rPr lang="en-US" altLang="zh-TW"/>
               <a:t>Fourth level</a:t>
             </a:r>
           </a:p>
           <a:p>
             <a:pPr lvl="4"/>
             <a:r>
-              <a:rPr lang="en-US" altLang="zh-TW" smtClean="0"/>
+              <a:rPr lang="en-US" altLang="zh-TW"/>
               <a:t>Fifth level</a:t>
             </a:r>
             <a:endParaRPr lang="zh-TW" altLang="en-US"/>
@@ -1351,7 +1351,7 @@
           <a:p>
             <a:fld id="{F1F17F5A-78C3-4C81-9BEA-AC4AB491BAD8}" type="datetimeFigureOut">
               <a:rPr lang="vi-VN" smtClean="0"/>
-              <a:t>30/01/2021</a:t>
+              <a:t>01/06/2024</a:t>
             </a:fld>
             <a:endParaRPr lang="vi-VN"/>
           </a:p>
@@ -1449,7 +1449,7 @@
           </a:lstStyle>
           <a:p>
             <a:r>
-              <a:rPr lang="en-US" altLang="zh-TW" smtClean="0"/>
+              <a:rPr lang="en-US" altLang="zh-TW"/>
               <a:t>Click to edit Master title style</a:t>
             </a:r>
             <a:endParaRPr lang="zh-TW" altLang="en-US"/>
@@ -1515,7 +1515,7 @@
           <a:p>
             <a:pPr lvl="0"/>
             <a:r>
-              <a:rPr lang="en-US" altLang="zh-TW" smtClean="0"/>
+              <a:rPr lang="en-US" altLang="zh-TW"/>
               <a:t>Edit Master text styles</a:t>
             </a:r>
           </a:p>
@@ -1571,35 +1571,35 @@
           <a:p>
             <a:pPr lvl="0"/>
             <a:r>
-              <a:rPr lang="en-US" altLang="zh-TW" smtClean="0"/>
+              <a:rPr lang="en-US" altLang="zh-TW"/>
               <a:t>Edit Master text styles</a:t>
             </a:r>
           </a:p>
           <a:p>
             <a:pPr lvl="1"/>
             <a:r>
-              <a:rPr lang="en-US" altLang="zh-TW" smtClean="0"/>
+              <a:rPr lang="en-US" altLang="zh-TW"/>
               <a:t>Second level</a:t>
             </a:r>
           </a:p>
           <a:p>
             <a:pPr lvl="2"/>
             <a:r>
-              <a:rPr lang="en-US" altLang="zh-TW" smtClean="0"/>
+              <a:rPr lang="en-US" altLang="zh-TW"/>
               <a:t>Third level</a:t>
             </a:r>
           </a:p>
           <a:p>
             <a:pPr lvl="3"/>
             <a:r>
-              <a:rPr lang="en-US" altLang="zh-TW" smtClean="0"/>
+              <a:rPr lang="en-US" altLang="zh-TW"/>
               <a:t>Fourth level</a:t>
             </a:r>
           </a:p>
           <a:p>
             <a:pPr lvl="4"/>
             <a:r>
-              <a:rPr lang="en-US" altLang="zh-TW" smtClean="0"/>
+              <a:rPr lang="en-US" altLang="zh-TW"/>
               <a:t>Fifth level</a:t>
             </a:r>
             <a:endParaRPr lang="zh-TW" altLang="en-US"/>
@@ -1665,7 +1665,7 @@
           <a:p>
             <a:pPr lvl="0"/>
             <a:r>
-              <a:rPr lang="en-US" altLang="zh-TW" smtClean="0"/>
+              <a:rPr lang="en-US" altLang="zh-TW"/>
               <a:t>Edit Master text styles</a:t>
             </a:r>
           </a:p>
@@ -1721,35 +1721,35 @@
           <a:p>
             <a:pPr lvl="0"/>
             <a:r>
-              <a:rPr lang="en-US" altLang="zh-TW" smtClean="0"/>
+              <a:rPr lang="en-US" altLang="zh-TW"/>
               <a:t>Edit Master text styles</a:t>
             </a:r>
           </a:p>
           <a:p>
             <a:pPr lvl="1"/>
             <a:r>
-              <a:rPr lang="en-US" altLang="zh-TW" smtClean="0"/>
+              <a:rPr lang="en-US" altLang="zh-TW"/>
               <a:t>Second level</a:t>
             </a:r>
           </a:p>
           <a:p>
             <a:pPr lvl="2"/>
             <a:r>
-              <a:rPr lang="en-US" altLang="zh-TW" smtClean="0"/>
+              <a:rPr lang="en-US" altLang="zh-TW"/>
               <a:t>Third level</a:t>
             </a:r>
           </a:p>
           <a:p>
             <a:pPr lvl="3"/>
             <a:r>
-              <a:rPr lang="en-US" altLang="zh-TW" smtClean="0"/>
+              <a:rPr lang="en-US" altLang="zh-TW"/>
               <a:t>Fourth level</a:t>
             </a:r>
           </a:p>
           <a:p>
             <a:pPr lvl="4"/>
             <a:r>
-              <a:rPr lang="en-US" altLang="zh-TW" smtClean="0"/>
+              <a:rPr lang="en-US" altLang="zh-TW"/>
               <a:t>Fifth level</a:t>
             </a:r>
             <a:endParaRPr lang="zh-TW" altLang="en-US"/>
@@ -1773,7 +1773,7 @@
           <a:p>
             <a:fld id="{F1F17F5A-78C3-4C81-9BEA-AC4AB491BAD8}" type="datetimeFigureOut">
               <a:rPr lang="vi-VN" smtClean="0"/>
-              <a:t>30/01/2021</a:t>
+              <a:t>01/06/2024</a:t>
             </a:fld>
             <a:endParaRPr lang="vi-VN"/>
           </a:p>
@@ -1867,7 +1867,7 @@
           <a:lstStyle/>
           <a:p>
             <a:r>
-              <a:rPr lang="en-US" altLang="zh-TW" smtClean="0"/>
+              <a:rPr lang="en-US" altLang="zh-TW"/>
               <a:t>Click to edit Master title style</a:t>
             </a:r>
             <a:endParaRPr lang="zh-TW" altLang="en-US"/>
@@ -1891,7 +1891,7 @@
           <a:p>
             <a:fld id="{F1F17F5A-78C3-4C81-9BEA-AC4AB491BAD8}" type="datetimeFigureOut">
               <a:rPr lang="vi-VN" smtClean="0"/>
-              <a:t>30/01/2021</a:t>
+              <a:t>01/06/2024</a:t>
             </a:fld>
             <a:endParaRPr lang="vi-VN"/>
           </a:p>
@@ -1986,7 +1986,7 @@
           <a:p>
             <a:fld id="{F1F17F5A-78C3-4C81-9BEA-AC4AB491BAD8}" type="datetimeFigureOut">
               <a:rPr lang="vi-VN" smtClean="0"/>
-              <a:t>30/01/2021</a:t>
+              <a:t>01/06/2024</a:t>
             </a:fld>
             <a:endParaRPr lang="vi-VN"/>
           </a:p>
@@ -2089,7 +2089,7 @@
           </a:lstStyle>
           <a:p>
             <a:r>
-              <a:rPr lang="en-US" altLang="zh-TW" smtClean="0"/>
+              <a:rPr lang="en-US" altLang="zh-TW"/>
               <a:t>Click to edit Master title style</a:t>
             </a:r>
             <a:endParaRPr lang="zh-TW" altLang="en-US"/>
@@ -2146,35 +2146,35 @@
           <a:p>
             <a:pPr lvl="0"/>
             <a:r>
-              <a:rPr lang="en-US" altLang="zh-TW" smtClean="0"/>
+              <a:rPr lang="en-US" altLang="zh-TW"/>
               <a:t>Edit Master text styles</a:t>
             </a:r>
           </a:p>
           <a:p>
             <a:pPr lvl="1"/>
             <a:r>
-              <a:rPr lang="en-US" altLang="zh-TW" smtClean="0"/>
+              <a:rPr lang="en-US" altLang="zh-TW"/>
               <a:t>Second level</a:t>
             </a:r>
           </a:p>
           <a:p>
             <a:pPr lvl="2"/>
             <a:r>
-              <a:rPr lang="en-US" altLang="zh-TW" smtClean="0"/>
+              <a:rPr lang="en-US" altLang="zh-TW"/>
               <a:t>Third level</a:t>
             </a:r>
           </a:p>
           <a:p>
             <a:pPr lvl="3"/>
             <a:r>
-              <a:rPr lang="en-US" altLang="zh-TW" smtClean="0"/>
+              <a:rPr lang="en-US" altLang="zh-TW"/>
               <a:t>Fourth level</a:t>
             </a:r>
           </a:p>
           <a:p>
             <a:pPr lvl="4"/>
             <a:r>
-              <a:rPr lang="en-US" altLang="zh-TW" smtClean="0"/>
+              <a:rPr lang="en-US" altLang="zh-TW"/>
               <a:t>Fifth level</a:t>
             </a:r>
             <a:endParaRPr lang="zh-TW" altLang="en-US"/>
@@ -2240,7 +2240,7 @@
           <a:p>
             <a:pPr lvl="0"/>
             <a:r>
-              <a:rPr lang="en-US" altLang="zh-TW" smtClean="0"/>
+              <a:rPr lang="en-US" altLang="zh-TW"/>
               <a:t>Edit Master text styles</a:t>
             </a:r>
           </a:p>
@@ -2263,7 +2263,7 @@
           <a:p>
             <a:fld id="{F1F17F5A-78C3-4C81-9BEA-AC4AB491BAD8}" type="datetimeFigureOut">
               <a:rPr lang="vi-VN" smtClean="0"/>
-              <a:t>30/01/2021</a:t>
+              <a:t>01/06/2024</a:t>
             </a:fld>
             <a:endParaRPr lang="vi-VN"/>
           </a:p>
@@ -2366,7 +2366,7 @@
           </a:lstStyle>
           <a:p>
             <a:r>
-              <a:rPr lang="en-US" altLang="zh-TW" smtClean="0"/>
+              <a:rPr lang="en-US" altLang="zh-TW"/>
               <a:t>Click to edit Master title style</a:t>
             </a:r>
             <a:endParaRPr lang="zh-TW" altLang="en-US"/>
@@ -2431,7 +2431,7 @@
           </a:lstStyle>
           <a:p>
             <a:r>
-              <a:rPr lang="en-US" altLang="zh-TW" smtClean="0"/>
+              <a:rPr lang="en-US" altLang="zh-TW"/>
               <a:t>Click icon to add picture</a:t>
             </a:r>
             <a:endParaRPr lang="zh-TW" altLang="en-US"/>
@@ -2497,7 +2497,7 @@
           <a:p>
             <a:pPr lvl="0"/>
             <a:r>
-              <a:rPr lang="en-US" altLang="zh-TW" smtClean="0"/>
+              <a:rPr lang="en-US" altLang="zh-TW"/>
               <a:t>Edit Master text styles</a:t>
             </a:r>
           </a:p>
@@ -2520,7 +2520,7 @@
           <a:p>
             <a:fld id="{F1F17F5A-78C3-4C81-9BEA-AC4AB491BAD8}" type="datetimeFigureOut">
               <a:rPr lang="vi-VN" smtClean="0"/>
-              <a:t>30/01/2021</a:t>
+              <a:t>01/06/2024</a:t>
             </a:fld>
             <a:endParaRPr lang="vi-VN"/>
           </a:p>
@@ -2634,10 +2634,9 @@
           <a:lstStyle/>
           <a:p>
             <a:r>
-              <a:rPr lang="zh-TW" altLang="en-US" smtClean="0"/>
+              <a:rPr lang="zh-TW" altLang="en-US"/>
               <a:t>按一下以編輯母片標題樣式</a:t>
             </a:r>
-            <a:endParaRPr lang="zh-TW" altLang="en-US"/>
           </a:p>
         </p:txBody>
       </p:sp>
@@ -2668,38 +2667,37 @@
           <a:p>
             <a:pPr lvl="0"/>
             <a:r>
-              <a:rPr lang="zh-TW" altLang="en-US" smtClean="0"/>
+              <a:rPr lang="zh-TW" altLang="en-US"/>
               <a:t>按一下以編輯母片文字樣式</a:t>
             </a:r>
           </a:p>
           <a:p>
             <a:pPr lvl="1"/>
             <a:r>
-              <a:rPr lang="zh-TW" altLang="en-US" smtClean="0"/>
+              <a:rPr lang="zh-TW" altLang="en-US"/>
               <a:t>第二層</a:t>
             </a:r>
           </a:p>
           <a:p>
             <a:pPr lvl="2"/>
             <a:r>
-              <a:rPr lang="zh-TW" altLang="en-US" smtClean="0"/>
+              <a:rPr lang="zh-TW" altLang="en-US"/>
               <a:t>第三層</a:t>
             </a:r>
           </a:p>
           <a:p>
             <a:pPr lvl="3"/>
             <a:r>
-              <a:rPr lang="zh-TW" altLang="en-US" smtClean="0"/>
+              <a:rPr lang="zh-TW" altLang="en-US"/>
               <a:t>第四層</a:t>
             </a:r>
           </a:p>
           <a:p>
             <a:pPr lvl="4"/>
             <a:r>
-              <a:rPr lang="zh-TW" altLang="en-US" smtClean="0"/>
+              <a:rPr lang="zh-TW" altLang="en-US"/>
               <a:t>第五層</a:t>
             </a:r>
-            <a:endParaRPr lang="zh-TW" altLang="en-US"/>
           </a:p>
         </p:txBody>
       </p:sp>
@@ -2738,7 +2736,7 @@
           <a:p>
             <a:fld id="{F1F17F5A-78C3-4C81-9BEA-AC4AB491BAD8}" type="datetimeFigureOut">
               <a:rPr lang="vi-VN" smtClean="0"/>
-              <a:t>30/01/2021</a:t>
+              <a:t>01/06/2024</a:t>
             </a:fld>
             <a:endParaRPr lang="vi-VN"/>
           </a:p>
@@ -3125,7 +3123,7 @@
         </p:nvSpPr>
         <p:spPr>
           <a:xfrm>
-            <a:off x="0" y="2857513"/>
+            <a:off x="0" y="2739947"/>
             <a:ext cx="12192000" cy="1143000"/>
           </a:xfrm>
         </p:spPr>
@@ -3150,24 +3148,7 @@
                 <a:latin typeface="微軟正黑體" pitchFamily="34" charset="-120"/>
                 <a:ea typeface="微軟正黑體" pitchFamily="34" charset="-120"/>
               </a:rPr>
-              <a:t>在</a:t>
-            </a:r>
-            <a:r>
-              <a:rPr lang="zh-TW" altLang="en-US" sz="7200" b="1" i="1" dirty="0">
-                <a:solidFill>
-                  <a:srgbClr val="660033"/>
-                </a:solidFill>
-                <a:effectLst>
-                  <a:outerShdw blurRad="38100" dist="38100" dir="2700000" algn="tl">
-                    <a:srgbClr val="000000">
-                      <a:alpha val="43137"/>
-                    </a:srgbClr>
-                  </a:outerShdw>
-                </a:effectLst>
-                <a:latin typeface="微軟正黑體" pitchFamily="34" charset="-120"/>
-                <a:ea typeface="微軟正黑體" pitchFamily="34" charset="-120"/>
-              </a:rPr>
-              <a:t>耶穌的腳前</a:t>
+              <a:t>在耶穌的腳前</a:t>
             </a:r>
           </a:p>
         </p:txBody>
@@ -3269,6 +3250,74 @@
           </a:p>
         </p:txBody>
       </p:sp>
+      <p:sp>
+        <p:nvSpPr>
+          <p:cNvPr id="2" name="TextBox 1">
+            <a:extLst>
+              <a:ext uri="{FF2B5EF4-FFF2-40B4-BE49-F238E27FC236}">
+                <a16:creationId xmlns:a16="http://schemas.microsoft.com/office/drawing/2014/main" id="{FE85C6F7-1641-D518-E51F-1BB58780C1E3}"/>
+              </a:ext>
+            </a:extLst>
+          </p:cNvPr>
+          <p:cNvSpPr txBox="1"/>
+          <p:nvPr/>
+        </p:nvSpPr>
+        <p:spPr>
+          <a:xfrm>
+            <a:off x="0" y="5174180"/>
+            <a:ext cx="12192000" cy="584775"/>
+          </a:xfrm>
+          <a:prstGeom prst="rect">
+            <a:avLst/>
+          </a:prstGeom>
+          <a:noFill/>
+        </p:spPr>
+        <p:txBody>
+          <a:bodyPr wrap="square" rtlCol="0">
+            <a:spAutoFit/>
+          </a:bodyPr>
+          <a:lstStyle/>
+          <a:p>
+            <a:pPr algn="ctr"/>
+            <a:r>
+              <a:rPr lang="en-US" sz="3200" b="1" dirty="0">
+                <a:solidFill>
+                  <a:srgbClr val="660033"/>
+                </a:solidFill>
+                <a:latin typeface="Microsoft JhengHei" panose="020B0604030504040204" pitchFamily="34" charset="-120"/>
+                <a:ea typeface="Microsoft JhengHei" panose="020B0604030504040204" pitchFamily="34" charset="-120"/>
+              </a:rPr>
+              <a:t>( </a:t>
+            </a:r>
+            <a:r>
+              <a:rPr lang="zh-CN" altLang="en-US" sz="3200" b="1" dirty="0">
+                <a:solidFill>
+                  <a:srgbClr val="660033"/>
+                </a:solidFill>
+                <a:latin typeface="Microsoft JhengHei" panose="020B0604030504040204" pitchFamily="34" charset="-120"/>
+                <a:ea typeface="Microsoft JhengHei" panose="020B0604030504040204" pitchFamily="34" charset="-120"/>
+              </a:rPr>
+              <a:t>正歌</a:t>
+            </a:r>
+            <a:r>
+              <a:rPr lang="en-US" sz="3200" b="1" dirty="0">
+                <a:solidFill>
+                  <a:srgbClr val="660033"/>
+                </a:solidFill>
+                <a:latin typeface="Microsoft JhengHei" panose="020B0604030504040204" pitchFamily="34" charset="-120"/>
+                <a:ea typeface="Microsoft JhengHei" panose="020B0604030504040204" pitchFamily="34" charset="-120"/>
+              </a:rPr>
+              <a:t> )</a:t>
+            </a:r>
+            <a:endParaRPr lang="vi-VN" sz="3200" b="1" dirty="0">
+              <a:solidFill>
+                <a:srgbClr val="660033"/>
+              </a:solidFill>
+              <a:ea typeface="Microsoft JhengHei" panose="020B0604030504040204" pitchFamily="34" charset="-120"/>
+            </a:endParaRPr>
+          </a:p>
+        </p:txBody>
+      </p:sp>
     </p:spTree>
     <p:extLst>
       <p:ext uri="{BB962C8B-B14F-4D97-AF65-F5344CB8AC3E}">
@@ -3365,6 +3414,74 @@
           </a:p>
         </p:txBody>
       </p:sp>
+      <p:sp>
+        <p:nvSpPr>
+          <p:cNvPr id="2" name="TextBox 1">
+            <a:extLst>
+              <a:ext uri="{FF2B5EF4-FFF2-40B4-BE49-F238E27FC236}">
+                <a16:creationId xmlns:a16="http://schemas.microsoft.com/office/drawing/2014/main" id="{4CF3EED2-4648-FB50-4B8B-B14443095AC3}"/>
+              </a:ext>
+            </a:extLst>
+          </p:cNvPr>
+          <p:cNvSpPr txBox="1"/>
+          <p:nvPr/>
+        </p:nvSpPr>
+        <p:spPr>
+          <a:xfrm>
+            <a:off x="0" y="5174180"/>
+            <a:ext cx="12192000" cy="584775"/>
+          </a:xfrm>
+          <a:prstGeom prst="rect">
+            <a:avLst/>
+          </a:prstGeom>
+          <a:noFill/>
+        </p:spPr>
+        <p:txBody>
+          <a:bodyPr wrap="square" rtlCol="0">
+            <a:spAutoFit/>
+          </a:bodyPr>
+          <a:lstStyle/>
+          <a:p>
+            <a:pPr algn="ctr"/>
+            <a:r>
+              <a:rPr lang="en-US" sz="3200" b="1" dirty="0">
+                <a:solidFill>
+                  <a:srgbClr val="660033"/>
+                </a:solidFill>
+                <a:latin typeface="Microsoft JhengHei" panose="020B0604030504040204" pitchFamily="34" charset="-120"/>
+                <a:ea typeface="Microsoft JhengHei" panose="020B0604030504040204" pitchFamily="34" charset="-120"/>
+              </a:rPr>
+              <a:t>( </a:t>
+            </a:r>
+            <a:r>
+              <a:rPr lang="zh-CN" altLang="en-US" sz="3200" b="1" dirty="0">
+                <a:solidFill>
+                  <a:srgbClr val="660033"/>
+                </a:solidFill>
+                <a:latin typeface="Microsoft JhengHei" panose="020B0604030504040204" pitchFamily="34" charset="-120"/>
+                <a:ea typeface="Microsoft JhengHei" panose="020B0604030504040204" pitchFamily="34" charset="-120"/>
+              </a:rPr>
+              <a:t>正歌</a:t>
+            </a:r>
+            <a:r>
+              <a:rPr lang="en-US" sz="3200" b="1" dirty="0">
+                <a:solidFill>
+                  <a:srgbClr val="660033"/>
+                </a:solidFill>
+                <a:latin typeface="Microsoft JhengHei" panose="020B0604030504040204" pitchFamily="34" charset="-120"/>
+                <a:ea typeface="Microsoft JhengHei" panose="020B0604030504040204" pitchFamily="34" charset="-120"/>
+              </a:rPr>
+              <a:t> )</a:t>
+            </a:r>
+            <a:endParaRPr lang="vi-VN" sz="3200" b="1" dirty="0">
+              <a:solidFill>
+                <a:srgbClr val="660033"/>
+              </a:solidFill>
+              <a:ea typeface="Microsoft JhengHei" panose="020B0604030504040204" pitchFamily="34" charset="-120"/>
+            </a:endParaRPr>
+          </a:p>
+        </p:txBody>
+      </p:sp>
     </p:spTree>
     <p:extLst>
       <p:ext uri="{BB962C8B-B14F-4D97-AF65-F5344CB8AC3E}">
@@ -3462,6 +3579,74 @@
           </a:p>
         </p:txBody>
       </p:sp>
+      <p:sp>
+        <p:nvSpPr>
+          <p:cNvPr id="2" name="TextBox 1">
+            <a:extLst>
+              <a:ext uri="{FF2B5EF4-FFF2-40B4-BE49-F238E27FC236}">
+                <a16:creationId xmlns:a16="http://schemas.microsoft.com/office/drawing/2014/main" id="{9ABF52C5-F8A0-C5A2-8168-854FA902FF2F}"/>
+              </a:ext>
+            </a:extLst>
+          </p:cNvPr>
+          <p:cNvSpPr txBox="1"/>
+          <p:nvPr/>
+        </p:nvSpPr>
+        <p:spPr>
+          <a:xfrm>
+            <a:off x="0" y="5174180"/>
+            <a:ext cx="12192000" cy="584775"/>
+          </a:xfrm>
+          <a:prstGeom prst="rect">
+            <a:avLst/>
+          </a:prstGeom>
+          <a:noFill/>
+        </p:spPr>
+        <p:txBody>
+          <a:bodyPr wrap="square" rtlCol="0">
+            <a:spAutoFit/>
+          </a:bodyPr>
+          <a:lstStyle/>
+          <a:p>
+            <a:pPr algn="ctr"/>
+            <a:r>
+              <a:rPr lang="en-US" sz="3200" b="1" dirty="0">
+                <a:solidFill>
+                  <a:srgbClr val="660033"/>
+                </a:solidFill>
+                <a:latin typeface="Microsoft JhengHei" panose="020B0604030504040204" pitchFamily="34" charset="-120"/>
+                <a:ea typeface="Microsoft JhengHei" panose="020B0604030504040204" pitchFamily="34" charset="-120"/>
+              </a:rPr>
+              <a:t>( </a:t>
+            </a:r>
+            <a:r>
+              <a:rPr lang="zh-CN" altLang="en-US" sz="3200" b="1" dirty="0">
+                <a:solidFill>
+                  <a:srgbClr val="660033"/>
+                </a:solidFill>
+                <a:latin typeface="Microsoft JhengHei" panose="020B0604030504040204" pitchFamily="34" charset="-120"/>
+                <a:ea typeface="Microsoft JhengHei" panose="020B0604030504040204" pitchFamily="34" charset="-120"/>
+              </a:rPr>
+              <a:t>副歌</a:t>
+            </a:r>
+            <a:r>
+              <a:rPr lang="en-US" sz="3200" b="1" dirty="0">
+                <a:solidFill>
+                  <a:srgbClr val="660033"/>
+                </a:solidFill>
+                <a:latin typeface="Microsoft JhengHei" panose="020B0604030504040204" pitchFamily="34" charset="-120"/>
+                <a:ea typeface="Microsoft JhengHei" panose="020B0604030504040204" pitchFamily="34" charset="-120"/>
+              </a:rPr>
+              <a:t> )</a:t>
+            </a:r>
+            <a:endParaRPr lang="vi-VN" sz="3200" b="1" dirty="0">
+              <a:solidFill>
+                <a:srgbClr val="660033"/>
+              </a:solidFill>
+              <a:ea typeface="Microsoft JhengHei" panose="020B0604030504040204" pitchFamily="34" charset="-120"/>
+            </a:endParaRPr>
+          </a:p>
+        </p:txBody>
+      </p:sp>
     </p:spTree>
     <p:extLst>
       <p:ext uri="{BB962C8B-B14F-4D97-AF65-F5344CB8AC3E}">
@@ -3547,23 +3732,81 @@
                 <a:latin typeface="Microsoft JhengHei" panose="020B0604030504040204" pitchFamily="34" charset="-120"/>
                 <a:ea typeface="Microsoft JhengHei" panose="020B0604030504040204" pitchFamily="34" charset="-120"/>
               </a:rPr>
-              <a:t>毫無保留  我敬拜</a:t>
-            </a:r>
-            <a:r>
-              <a:rPr lang="zh-CN" altLang="en-US" sz="6400" b="1" dirty="0">
+              <a:t>毫無保留  我敬拜祢</a:t>
+            </a:r>
+            <a:endParaRPr lang="vi-VN" sz="6400" b="1" dirty="0">
+              <a:solidFill>
+                <a:srgbClr val="660033"/>
+              </a:solidFill>
+              <a:latin typeface="Microsoft JhengHei" panose="020B0604030504040204" pitchFamily="34" charset="-120"/>
+              <a:ea typeface="Microsoft JhengHei" panose="020B0604030504040204" pitchFamily="34" charset="-120"/>
+            </a:endParaRPr>
+          </a:p>
+        </p:txBody>
+      </p:sp>
+      <p:sp>
+        <p:nvSpPr>
+          <p:cNvPr id="2" name="TextBox 1">
+            <a:extLst>
+              <a:ext uri="{FF2B5EF4-FFF2-40B4-BE49-F238E27FC236}">
+                <a16:creationId xmlns:a16="http://schemas.microsoft.com/office/drawing/2014/main" id="{CDC325A0-0560-4440-4979-F9ACEE93ECBA}"/>
+              </a:ext>
+            </a:extLst>
+          </p:cNvPr>
+          <p:cNvSpPr txBox="1"/>
+          <p:nvPr/>
+        </p:nvSpPr>
+        <p:spPr>
+          <a:xfrm>
+            <a:off x="0" y="5174180"/>
+            <a:ext cx="12192000" cy="584775"/>
+          </a:xfrm>
+          <a:prstGeom prst="rect">
+            <a:avLst/>
+          </a:prstGeom>
+          <a:noFill/>
+        </p:spPr>
+        <p:txBody>
+          <a:bodyPr wrap="square" rtlCol="0">
+            <a:spAutoFit/>
+          </a:bodyPr>
+          <a:lstStyle/>
+          <a:p>
+            <a:pPr algn="ctr"/>
+            <a:r>
+              <a:rPr lang="en-US" sz="3200" b="1" dirty="0">
                 <a:solidFill>
                   <a:srgbClr val="660033"/>
                 </a:solidFill>
                 <a:latin typeface="Microsoft JhengHei" panose="020B0604030504040204" pitchFamily="34" charset="-120"/>
                 <a:ea typeface="Microsoft JhengHei" panose="020B0604030504040204" pitchFamily="34" charset="-120"/>
               </a:rPr>
-              <a:t>袮</a:t>
-            </a:r>
-            <a:endParaRPr lang="vi-VN" sz="6400" b="1" dirty="0">
+              <a:t>( </a:t>
+            </a:r>
+            <a:r>
+              <a:rPr lang="zh-CN" altLang="en-US" sz="3200" b="1" dirty="0">
+                <a:solidFill>
+                  <a:srgbClr val="660033"/>
+                </a:solidFill>
+                <a:latin typeface="Microsoft JhengHei" panose="020B0604030504040204" pitchFamily="34" charset="-120"/>
+                <a:ea typeface="Microsoft JhengHei" panose="020B0604030504040204" pitchFamily="34" charset="-120"/>
+              </a:rPr>
+              <a:t>副歌</a:t>
+            </a:r>
+            <a:r>
+              <a:rPr lang="en-US" sz="3200" b="1" dirty="0">
+                <a:solidFill>
+                  <a:srgbClr val="660033"/>
+                </a:solidFill>
+                <a:latin typeface="Microsoft JhengHei" panose="020B0604030504040204" pitchFamily="34" charset="-120"/>
+                <a:ea typeface="Microsoft JhengHei" panose="020B0604030504040204" pitchFamily="34" charset="-120"/>
+              </a:rPr>
+              <a:t> )</a:t>
+            </a:r>
+            <a:endParaRPr lang="vi-VN" sz="3200" b="1" dirty="0">
               <a:solidFill>
                 <a:srgbClr val="660033"/>
               </a:solidFill>
-              <a:latin typeface="Microsoft JhengHei" panose="020B0604030504040204" pitchFamily="34" charset="-120"/>
               <a:ea typeface="Microsoft JhengHei" panose="020B0604030504040204" pitchFamily="34" charset="-120"/>
             </a:endParaRPr>
           </a:p>
